--- a/app/templates/colegio_de_profesores_del_peru/plantilla_curso_de_actualizacion.pptx
+++ b/app/templates/colegio_de_profesores_del_peru/plantilla_curso_de_actualizacion.pptx
@@ -3194,8 +3194,12 @@
           <a:p>
             <a:pPr algn="ctr"/>
             <a:r>
+              <a:rPr lang="es-PE" b="1"/>
+              <a:t>DE ACTUALIZACIÓN </a:t>
+            </a:r>
+            <a:r>
               <a:rPr lang="es-PE" b="1" dirty="0"/>
-              <a:t>DE CAPACITACIÓN en:</a:t>
+              <a:t>en:</a:t>
             </a:r>
             <a:endParaRPr lang="es-PE" sz="600" b="1" dirty="0"/>
           </a:p>
